--- a/SimReal-BP-ZH.pptx
+++ b/SimReal-BP-ZH.pptx
@@ -428,26 +428,24 @@
             <c:showLeaderLines val="0"/>
           </c:dLbls>
           <c:cat>
-            <c:multiLvlStrRef>
+            <c:strRef>
               <c:f>Sheet1!$A$2:$A$5</c:f>
-              <c:multiLvlStrCache>
+              <c:strCache>
                 <c:ptCount val="4"/>
-                <c:lvl>
-                  <c:pt idx="0">
-                    <c:v>Mercor</c:v>
-                  </c:pt>
-                  <c:pt idx="1">
-                    <c:v>Surge AI</c:v>
-                  </c:pt>
-                  <c:pt idx="2">
-                    <c:v>Snorkel AI</c:v>
-                  </c:pt>
-                  <c:pt idx="3">
-                    <c:v>AfterQuery</c:v>
-                  </c:pt>
-                </c:lvl>
-              </c:multiLvlStrCache>
-            </c:multiLvlStrRef>
+                <c:pt idx="0">
+                  <c:v>Mercor</c:v>
+                </c:pt>
+                <c:pt idx="1">
+                  <c:v>Surge AI</c:v>
+                </c:pt>
+                <c:pt idx="2">
+                  <c:v>Snorkel AI</c:v>
+                </c:pt>
+                <c:pt idx="3">
+                  <c:v>AfterQuery</c:v>
+                </c:pt>
+              </c:strCache>
+            </c:strRef>
           </c:cat>
           <c:val>
             <c:numRef>
@@ -903,38 +901,36 @@
             <c:showLeaderLines val="0"/>
           </c:dLbls>
           <c:cat>
-            <c:multiLvlStrRef>
+            <c:strRef>
               <c:f>Sheet1!$A$2:$A$9</c:f>
-              <c:multiLvlStrCache>
+              <c:strCache>
                 <c:ptCount val="8"/>
-                <c:lvl>
-                  <c:pt idx="0">
-                    <c:v>2025</c:v>
-                  </c:pt>
-                  <c:pt idx="1">
-                    <c:v>26</c:v>
-                  </c:pt>
-                  <c:pt idx="2">
-                    <c:v>27</c:v>
-                  </c:pt>
-                  <c:pt idx="3">
-                    <c:v>2028E</c:v>
-                  </c:pt>
-                  <c:pt idx="4">
-                    <c:v>29</c:v>
-                  </c:pt>
-                  <c:pt idx="5">
-                    <c:v>30</c:v>
-                  </c:pt>
-                  <c:pt idx="6">
-                    <c:v>31</c:v>
-                  </c:pt>
-                  <c:pt idx="7">
-                    <c:v>2032E</c:v>
-                  </c:pt>
-                </c:lvl>
-              </c:multiLvlStrCache>
-            </c:multiLvlStrRef>
+                <c:pt idx="0">
+                  <c:v>2025</c:v>
+                </c:pt>
+                <c:pt idx="1">
+                  <c:v>26</c:v>
+                </c:pt>
+                <c:pt idx="2">
+                  <c:v>27</c:v>
+                </c:pt>
+                <c:pt idx="3">
+                  <c:v>2028E</c:v>
+                </c:pt>
+                <c:pt idx="4">
+                  <c:v>29</c:v>
+                </c:pt>
+                <c:pt idx="5">
+                  <c:v>30</c:v>
+                </c:pt>
+                <c:pt idx="6">
+                  <c:v>31</c:v>
+                </c:pt>
+                <c:pt idx="7">
+                  <c:v>2032E</c:v>
+                </c:pt>
+              </c:strCache>
+            </c:strRef>
           </c:cat>
           <c:val>
             <c:numRef>
@@ -1278,20 +1274,18 @@
             <c:showLeaderLines val="0"/>
           </c:dLbls>
           <c:cat>
-            <c:multiLvlStrRef>
+            <c:strRef>
               <c:f>Sheet1!$A$2:$A$3</c:f>
-              <c:multiLvlStrCache>
+              <c:strCache>
                 <c:ptCount val="2"/>
-                <c:lvl>
-                  <c:pt idx="0">
-                    <c:v>人类参考分</c:v>
-                  </c:pt>
-                  <c:pt idx="1">
-                    <c:v>前沿模型最高</c:v>
-                  </c:pt>
-                </c:lvl>
-              </c:multiLvlStrCache>
-            </c:multiLvlStrRef>
+                <c:pt idx="0">
+                  <c:v>人类参考分</c:v>
+                </c:pt>
+                <c:pt idx="1">
+                  <c:v>前沿模型最高</c:v>
+                </c:pt>
+              </c:strCache>
+            </c:strRef>
           </c:cat>
           <c:val>
             <c:numRef>
